--- a/artifacts/editorial_accent_20261022/pptx/Figure11_Accent.pptx
+++ b/artifacts/editorial_accent_20261022/pptx/Figure11_Accent.pptx
@@ -52,6 +52,14 @@
 <file path=ppt/slides/slide1.xml><?xml version="1.0" encoding="utf-8"?>
 <p:sld xmlns:a="http://schemas.openxmlformats.org/drawingml/2006/main" xmlns:r="http://schemas.openxmlformats.org/officeDocument/2006/relationships" xmlns:p="http://schemas.openxmlformats.org/presentationml/2006/main">
   <p:cSld>
+    <p:bg>
+      <p:bgPr>
+        <a:solidFill>
+          <a:srgbClr val="FFFFFF"/>
+        </a:solidFill>
+        <a:effectLst/>
+      </p:bgPr>
+    </p:bg>
     <p:spTree>
       <p:nvGrpSpPr>
         <p:cNvPr id="1" name=""/>
@@ -360,7 +368,7 @@
                     <a:solidFill>
                       <a:srgbClr val="222222"/>
                     </a:solidFill>
-                    <a:latin typeface="Comic Sans MS"/>
+                    <a:latin typeface="Times New Roman"/>
                     <a:ea typeface="Times New Roman"/>
                     <a:cs typeface="Times New Roman"/>
                   </a:rPr>
@@ -403,7 +411,7 @@
                     <a:solidFill>
                       <a:srgbClr val="222222"/>
                     </a:solidFill>
-                    <a:latin typeface="Arial"/>
+                    <a:latin typeface="Times New Roman"/>
                     <a:ea typeface="Times New Roman"/>
                     <a:cs typeface="Times New Roman"/>
                   </a:rPr>
@@ -420,7 +428,7 @@
                     <a:solidFill>
                       <a:srgbClr val="222222"/>
                     </a:solidFill>
-                    <a:latin typeface="Arial"/>
+                    <a:latin typeface="Times New Roman"/>
                     <a:ea typeface="Times New Roman"/>
                     <a:cs typeface="Times New Roman"/>
                   </a:rPr>
@@ -463,7 +471,7 @@
                     <a:solidFill>
                       <a:srgbClr val="222222"/>
                     </a:solidFill>
-                    <a:latin typeface="Arial"/>
+                    <a:latin typeface="Times New Roman"/>
                     <a:ea typeface="Times New Roman"/>
                     <a:cs typeface="Times New Roman"/>
                   </a:rPr>
@@ -506,7 +514,7 @@
                     <a:solidFill>
                       <a:srgbClr val="222222"/>
                     </a:solidFill>
-                    <a:latin typeface="Arial"/>
+                    <a:latin typeface="Times New Roman"/>
                     <a:ea typeface="Times New Roman"/>
                     <a:cs typeface="Times New Roman"/>
                   </a:rPr>
@@ -689,7 +697,7 @@
                     <a:solidFill>
                       <a:srgbClr val="222222"/>
                     </a:solidFill>
-                    <a:latin typeface="Comic Sans MS"/>
+                    <a:latin typeface="Times New Roman"/>
                     <a:ea typeface="Times New Roman"/>
                     <a:cs typeface="Times New Roman"/>
                   </a:rPr>
@@ -732,7 +740,7 @@
                     <a:solidFill>
                       <a:srgbClr val="222222"/>
                     </a:solidFill>
-                    <a:latin typeface="Arial"/>
+                    <a:latin typeface="Times New Roman"/>
                     <a:ea typeface="Times New Roman"/>
                     <a:cs typeface="Times New Roman"/>
                   </a:rPr>
@@ -775,7 +783,7 @@
                     <a:solidFill>
                       <a:srgbClr val="222222"/>
                     </a:solidFill>
-                    <a:latin typeface="Arial"/>
+                    <a:latin typeface="Times New Roman"/>
                     <a:ea typeface="Times New Roman"/>
                     <a:cs typeface="Times New Roman"/>
                   </a:rPr>
@@ -818,7 +826,7 @@
                     <a:solidFill>
                       <a:srgbClr val="222222"/>
                     </a:solidFill>
-                    <a:latin typeface="Arial"/>
+                    <a:latin typeface="Times New Roman"/>
                     <a:ea typeface="Times New Roman"/>
                     <a:cs typeface="Times New Roman"/>
                   </a:rPr>
@@ -1124,7 +1132,7 @@
                     <a:solidFill>
                       <a:srgbClr val="222222"/>
                     </a:solidFill>
-                    <a:latin typeface="Comic Sans MS"/>
+                    <a:latin typeface="Times New Roman"/>
                     <a:ea typeface="Times New Roman"/>
                     <a:cs typeface="Times New Roman"/>
                   </a:rPr>
@@ -1167,7 +1175,7 @@
                     <a:solidFill>
                       <a:srgbClr val="222222"/>
                     </a:solidFill>
-                    <a:latin typeface="Arial"/>
+                    <a:latin typeface="Times New Roman"/>
                     <a:ea typeface="Times New Roman"/>
                     <a:cs typeface="Times New Roman"/>
                   </a:rPr>
@@ -1210,7 +1218,7 @@
                     <a:solidFill>
                       <a:srgbClr val="222222"/>
                     </a:solidFill>
-                    <a:latin typeface="Arial"/>
+                    <a:latin typeface="Times New Roman"/>
                     <a:ea typeface="Times New Roman"/>
                     <a:cs typeface="Times New Roman"/>
                   </a:rPr>
@@ -1253,7 +1261,7 @@
                     <a:solidFill>
                       <a:srgbClr val="222222"/>
                     </a:solidFill>
-                    <a:latin typeface="Arial"/>
+                    <a:latin typeface="Times New Roman"/>
                     <a:ea typeface="Times New Roman"/>
                     <a:cs typeface="Times New Roman"/>
                   </a:rPr>
@@ -1497,7 +1505,7 @@
                     <a:solidFill>
                       <a:srgbClr val="222222"/>
                     </a:solidFill>
-                    <a:latin typeface="Comic Sans MS"/>
+                    <a:latin typeface="Times New Roman"/>
                     <a:ea typeface="Times New Roman"/>
                     <a:cs typeface="Times New Roman"/>
                   </a:rPr>
@@ -1540,7 +1548,7 @@
                     <a:solidFill>
                       <a:srgbClr val="222222"/>
                     </a:solidFill>
-                    <a:latin typeface="Arial"/>
+                    <a:latin typeface="Times New Roman"/>
                     <a:ea typeface="Times New Roman"/>
                     <a:cs typeface="Times New Roman"/>
                   </a:rPr>
@@ -1583,7 +1591,7 @@
                     <a:solidFill>
                       <a:srgbClr val="222222"/>
                     </a:solidFill>
-                    <a:latin typeface="Arial"/>
+                    <a:latin typeface="Times New Roman"/>
                     <a:ea typeface="Times New Roman"/>
                     <a:cs typeface="Times New Roman"/>
                   </a:rPr>
@@ -2311,7 +2319,7 @@
                     <a:solidFill>
                       <a:srgbClr val="222222"/>
                     </a:solidFill>
-                    <a:latin typeface="Comic Sans MS"/>
+                    <a:latin typeface="Times New Roman"/>
                     <a:ea typeface="Times New Roman"/>
                     <a:cs typeface="Times New Roman"/>
                   </a:rPr>
@@ -2354,7 +2362,7 @@
                     <a:solidFill>
                       <a:srgbClr val="222222"/>
                     </a:solidFill>
-                    <a:latin typeface="Arial"/>
+                    <a:latin typeface="Times New Roman"/>
                     <a:ea typeface="Times New Roman"/>
                     <a:cs typeface="Times New Roman"/>
                   </a:rPr>
@@ -2397,7 +2405,7 @@
                     <a:solidFill>
                       <a:srgbClr val="222222"/>
                     </a:solidFill>
-                    <a:latin typeface="Arial"/>
+                    <a:latin typeface="Times New Roman"/>
                     <a:ea typeface="Times New Roman"/>
                     <a:cs typeface="Times New Roman"/>
                   </a:rPr>
@@ -2440,7 +2448,7 @@
                     <a:solidFill>
                       <a:srgbClr val="222222"/>
                     </a:solidFill>
-                    <a:latin typeface="Arial"/>
+                    <a:latin typeface="Times New Roman"/>
                     <a:ea typeface="Times New Roman"/>
                     <a:cs typeface="Times New Roman"/>
                   </a:rPr>
@@ -2483,7 +2491,7 @@
                     <a:solidFill>
                       <a:srgbClr val="222222"/>
                     </a:solidFill>
-                    <a:latin typeface="Arial"/>
+                    <a:latin typeface="Times New Roman"/>
                     <a:ea typeface="Times New Roman"/>
                     <a:cs typeface="Times New Roman"/>
                   </a:rPr>
@@ -2663,7 +2671,7 @@
                     <a:solidFill>
                       <a:srgbClr val="222222"/>
                     </a:solidFill>
-                    <a:latin typeface="Comic Sans MS"/>
+                    <a:latin typeface="Times New Roman"/>
                     <a:ea typeface="Times New Roman"/>
                     <a:cs typeface="Times New Roman"/>
                   </a:rPr>
@@ -2706,7 +2714,7 @@
                     <a:solidFill>
                       <a:srgbClr val="222222"/>
                     </a:solidFill>
-                    <a:latin typeface="Arial"/>
+                    <a:latin typeface="Times New Roman"/>
                     <a:ea typeface="Times New Roman"/>
                     <a:cs typeface="Times New Roman"/>
                   </a:rPr>
@@ -2749,7 +2757,7 @@
                     <a:solidFill>
                       <a:srgbClr val="222222"/>
                     </a:solidFill>
-                    <a:latin typeface="Arial"/>
+                    <a:latin typeface="Times New Roman"/>
                     <a:ea typeface="Times New Roman"/>
                     <a:cs typeface="Times New Roman"/>
                   </a:rPr>
@@ -2766,7 +2774,7 @@
                     <a:solidFill>
                       <a:srgbClr val="222222"/>
                     </a:solidFill>
-                    <a:latin typeface="Arial"/>
+                    <a:latin typeface="Times New Roman"/>
                     <a:ea typeface="Times New Roman"/>
                     <a:cs typeface="Times New Roman"/>
                   </a:rPr>
@@ -2809,7 +2817,7 @@
                     <a:solidFill>
                       <a:srgbClr val="222222"/>
                     </a:solidFill>
-                    <a:latin typeface="Arial"/>
+                    <a:latin typeface="Times New Roman"/>
                     <a:ea typeface="Times New Roman"/>
                     <a:cs typeface="Times New Roman"/>
                   </a:rPr>
@@ -2852,7 +2860,7 @@
                     <a:solidFill>
                       <a:srgbClr val="222222"/>
                     </a:solidFill>
-                    <a:latin typeface="Arial"/>
+                    <a:latin typeface="Times New Roman"/>
                     <a:ea typeface="Times New Roman"/>
                     <a:cs typeface="Times New Roman"/>
                   </a:rPr>
@@ -2869,7 +2877,7 @@
                     <a:solidFill>
                       <a:srgbClr val="222222"/>
                     </a:solidFill>
-                    <a:latin typeface="Arial"/>
+                    <a:latin typeface="Times New Roman"/>
                     <a:ea typeface="Times New Roman"/>
                     <a:cs typeface="Times New Roman"/>
                   </a:rPr>
@@ -2912,7 +2920,7 @@
                     <a:solidFill>
                       <a:srgbClr val="222222"/>
                     </a:solidFill>
-                    <a:latin typeface="Arial"/>
+                    <a:latin typeface="Times New Roman"/>
                     <a:ea typeface="Times New Roman"/>
                     <a:cs typeface="Times New Roman"/>
                   </a:rPr>
@@ -2955,7 +2963,7 @@
                     <a:solidFill>
                       <a:srgbClr val="222222"/>
                     </a:solidFill>
-                    <a:latin typeface="Arial"/>
+                    <a:latin typeface="Times New Roman"/>
                     <a:ea typeface="Times New Roman"/>
                     <a:cs typeface="Times New Roman"/>
                   </a:rPr>
@@ -2972,7 +2980,7 @@
                     <a:solidFill>
                       <a:srgbClr val="222222"/>
                     </a:solidFill>
-                    <a:latin typeface="Arial"/>
+                    <a:latin typeface="Times New Roman"/>
                     <a:ea typeface="Times New Roman"/>
                     <a:cs typeface="Times New Roman"/>
                   </a:rPr>
@@ -3015,7 +3023,7 @@
                     <a:solidFill>
                       <a:srgbClr val="222222"/>
                     </a:solidFill>
-                    <a:latin typeface="Arial"/>
+                    <a:latin typeface="Times New Roman"/>
                     <a:ea typeface="Times New Roman"/>
                     <a:cs typeface="Times New Roman"/>
                   </a:rPr>
@@ -3318,7 +3326,7 @@
                     <a:solidFill>
                       <a:srgbClr val="222222"/>
                     </a:solidFill>
-                    <a:latin typeface="Comic Sans MS"/>
+                    <a:latin typeface="Times New Roman"/>
                     <a:ea typeface="Times New Roman"/>
                     <a:cs typeface="Times New Roman"/>
                   </a:rPr>
@@ -3361,7 +3369,7 @@
                     <a:solidFill>
                       <a:srgbClr val="222222"/>
                     </a:solidFill>
-                    <a:latin typeface="Arial"/>
+                    <a:latin typeface="Times New Roman"/>
                     <a:ea typeface="Times New Roman"/>
                     <a:cs typeface="Times New Roman"/>
                   </a:rPr>
@@ -3404,7 +3412,7 @@
                     <a:solidFill>
                       <a:srgbClr val="222222"/>
                     </a:solidFill>
-                    <a:latin typeface="Arial"/>
+                    <a:latin typeface="Times New Roman"/>
                     <a:ea typeface="Times New Roman"/>
                     <a:cs typeface="Times New Roman"/>
                   </a:rPr>
@@ -3447,7 +3455,7 @@
                     <a:solidFill>
                       <a:srgbClr val="222222"/>
                     </a:solidFill>
-                    <a:latin typeface="Arial"/>
+                    <a:latin typeface="Times New Roman"/>
                     <a:ea typeface="Times New Roman"/>
                     <a:cs typeface="Times New Roman"/>
                   </a:rPr>
@@ -3490,7 +3498,7 @@
                     <a:solidFill>
                       <a:srgbClr val="222222"/>
                     </a:solidFill>
-                    <a:latin typeface="Arial"/>
+                    <a:latin typeface="Times New Roman"/>
                     <a:ea typeface="Times New Roman"/>
                     <a:cs typeface="Times New Roman"/>
                   </a:rPr>
@@ -3533,7 +3541,7 @@
                     <a:solidFill>
                       <a:srgbClr val="222222"/>
                     </a:solidFill>
-                    <a:latin typeface="Arial"/>
+                    <a:latin typeface="Times New Roman"/>
                     <a:ea typeface="Times New Roman"/>
                     <a:cs typeface="Times New Roman"/>
                   </a:rPr>
@@ -3576,7 +3584,7 @@
                     <a:solidFill>
                       <a:srgbClr val="222222"/>
                     </a:solidFill>
-                    <a:latin typeface="Arial"/>
+                    <a:latin typeface="Times New Roman"/>
                     <a:ea typeface="Times New Roman"/>
                     <a:cs typeface="Times New Roman"/>
                   </a:rPr>
@@ -3619,7 +3627,7 @@
                     <a:solidFill>
                       <a:srgbClr val="222222"/>
                     </a:solidFill>
-                    <a:latin typeface="Arial"/>
+                    <a:latin typeface="Times New Roman"/>
                     <a:ea typeface="Times New Roman"/>
                     <a:cs typeface="Times New Roman"/>
                   </a:rPr>
@@ -3662,7 +3670,7 @@
                     <a:solidFill>
                       <a:srgbClr val="222222"/>
                     </a:solidFill>
-                    <a:latin typeface="Arial"/>
+                    <a:latin typeface="Times New Roman"/>
                     <a:ea typeface="Times New Roman"/>
                     <a:cs typeface="Times New Roman"/>
                   </a:rPr>
@@ -3705,7 +3713,7 @@
                     <a:solidFill>
                       <a:srgbClr val="222222"/>
                     </a:solidFill>
-                    <a:latin typeface="Arial"/>
+                    <a:latin typeface="Times New Roman"/>
                     <a:ea typeface="Times New Roman"/>
                     <a:cs typeface="Times New Roman"/>
                   </a:rPr>

--- a/artifacts/editorial_accent_20261022/pptx/Figure11_Accent.pptx
+++ b/artifacts/editorial_accent_20261022/pptx/Figure11_Accent.pptx
@@ -52,14 +52,6 @@
 <file path=ppt/slides/slide1.xml><?xml version="1.0" encoding="utf-8"?>
 <p:sld xmlns:a="http://schemas.openxmlformats.org/drawingml/2006/main" xmlns:r="http://schemas.openxmlformats.org/officeDocument/2006/relationships" xmlns:p="http://schemas.openxmlformats.org/presentationml/2006/main">
   <p:cSld>
-    <p:bg>
-      <p:bgPr>
-        <a:solidFill>
-          <a:srgbClr val="FFFFFF"/>
-        </a:solidFill>
-        <a:effectLst/>
-      </p:bgPr>
-    </p:bg>
     <p:spTree>
       <p:nvGrpSpPr>
         <p:cNvPr id="1" name=""/>
@@ -368,7 +360,7 @@
                     <a:solidFill>
                       <a:srgbClr val="222222"/>
                     </a:solidFill>
-                    <a:latin typeface="Times New Roman"/>
+                    <a:latin typeface="Comic Sans MS"/>
                     <a:ea typeface="Times New Roman"/>
                     <a:cs typeface="Times New Roman"/>
                   </a:rPr>
@@ -411,7 +403,7 @@
                     <a:solidFill>
                       <a:srgbClr val="222222"/>
                     </a:solidFill>
-                    <a:latin typeface="Times New Roman"/>
+                    <a:latin typeface="Arial"/>
                     <a:ea typeface="Times New Roman"/>
                     <a:cs typeface="Times New Roman"/>
                   </a:rPr>
@@ -428,7 +420,7 @@
                     <a:solidFill>
                       <a:srgbClr val="222222"/>
                     </a:solidFill>
-                    <a:latin typeface="Times New Roman"/>
+                    <a:latin typeface="Arial"/>
                     <a:ea typeface="Times New Roman"/>
                     <a:cs typeface="Times New Roman"/>
                   </a:rPr>
@@ -471,7 +463,7 @@
                     <a:solidFill>
                       <a:srgbClr val="222222"/>
                     </a:solidFill>
-                    <a:latin typeface="Times New Roman"/>
+                    <a:latin typeface="Arial"/>
                     <a:ea typeface="Times New Roman"/>
                     <a:cs typeface="Times New Roman"/>
                   </a:rPr>
@@ -514,7 +506,7 @@
                     <a:solidFill>
                       <a:srgbClr val="222222"/>
                     </a:solidFill>
-                    <a:latin typeface="Times New Roman"/>
+                    <a:latin typeface="Arial"/>
                     <a:ea typeface="Times New Roman"/>
                     <a:cs typeface="Times New Roman"/>
                   </a:rPr>
@@ -697,7 +689,7 @@
                     <a:solidFill>
                       <a:srgbClr val="222222"/>
                     </a:solidFill>
-                    <a:latin typeface="Times New Roman"/>
+                    <a:latin typeface="Comic Sans MS"/>
                     <a:ea typeface="Times New Roman"/>
                     <a:cs typeface="Times New Roman"/>
                   </a:rPr>
@@ -740,7 +732,7 @@
                     <a:solidFill>
                       <a:srgbClr val="222222"/>
                     </a:solidFill>
-                    <a:latin typeface="Times New Roman"/>
+                    <a:latin typeface="Arial"/>
                     <a:ea typeface="Times New Roman"/>
                     <a:cs typeface="Times New Roman"/>
                   </a:rPr>
@@ -783,7 +775,7 @@
                     <a:solidFill>
                       <a:srgbClr val="222222"/>
                     </a:solidFill>
-                    <a:latin typeface="Times New Roman"/>
+                    <a:latin typeface="Arial"/>
                     <a:ea typeface="Times New Roman"/>
                     <a:cs typeface="Times New Roman"/>
                   </a:rPr>
@@ -826,7 +818,7 @@
                     <a:solidFill>
                       <a:srgbClr val="222222"/>
                     </a:solidFill>
-                    <a:latin typeface="Times New Roman"/>
+                    <a:latin typeface="Arial"/>
                     <a:ea typeface="Times New Roman"/>
                     <a:cs typeface="Times New Roman"/>
                   </a:rPr>
@@ -1132,7 +1124,7 @@
                     <a:solidFill>
                       <a:srgbClr val="222222"/>
                     </a:solidFill>
-                    <a:latin typeface="Times New Roman"/>
+                    <a:latin typeface="Comic Sans MS"/>
                     <a:ea typeface="Times New Roman"/>
                     <a:cs typeface="Times New Roman"/>
                   </a:rPr>
@@ -1175,7 +1167,7 @@
                     <a:solidFill>
                       <a:srgbClr val="222222"/>
                     </a:solidFill>
-                    <a:latin typeface="Times New Roman"/>
+                    <a:latin typeface="Arial"/>
                     <a:ea typeface="Times New Roman"/>
                     <a:cs typeface="Times New Roman"/>
                   </a:rPr>
@@ -1218,7 +1210,7 @@
                     <a:solidFill>
                       <a:srgbClr val="222222"/>
                     </a:solidFill>
-                    <a:latin typeface="Times New Roman"/>
+                    <a:latin typeface="Arial"/>
                     <a:ea typeface="Times New Roman"/>
                     <a:cs typeface="Times New Roman"/>
                   </a:rPr>
@@ -1261,7 +1253,7 @@
                     <a:solidFill>
                       <a:srgbClr val="222222"/>
                     </a:solidFill>
-                    <a:latin typeface="Times New Roman"/>
+                    <a:latin typeface="Arial"/>
                     <a:ea typeface="Times New Roman"/>
                     <a:cs typeface="Times New Roman"/>
                   </a:rPr>
@@ -1505,7 +1497,7 @@
                     <a:solidFill>
                       <a:srgbClr val="222222"/>
                     </a:solidFill>
-                    <a:latin typeface="Times New Roman"/>
+                    <a:latin typeface="Comic Sans MS"/>
                     <a:ea typeface="Times New Roman"/>
                     <a:cs typeface="Times New Roman"/>
                   </a:rPr>
@@ -1548,7 +1540,7 @@
                     <a:solidFill>
                       <a:srgbClr val="222222"/>
                     </a:solidFill>
-                    <a:latin typeface="Times New Roman"/>
+                    <a:latin typeface="Arial"/>
                     <a:ea typeface="Times New Roman"/>
                     <a:cs typeface="Times New Roman"/>
                   </a:rPr>
@@ -1591,7 +1583,7 @@
                     <a:solidFill>
                       <a:srgbClr val="222222"/>
                     </a:solidFill>
-                    <a:latin typeface="Times New Roman"/>
+                    <a:latin typeface="Arial"/>
                     <a:ea typeface="Times New Roman"/>
                     <a:cs typeface="Times New Roman"/>
                   </a:rPr>
@@ -2319,7 +2311,7 @@
                     <a:solidFill>
                       <a:srgbClr val="222222"/>
                     </a:solidFill>
-                    <a:latin typeface="Times New Roman"/>
+                    <a:latin typeface="Comic Sans MS"/>
                     <a:ea typeface="Times New Roman"/>
                     <a:cs typeface="Times New Roman"/>
                   </a:rPr>
@@ -2362,7 +2354,7 @@
                     <a:solidFill>
                       <a:srgbClr val="222222"/>
                     </a:solidFill>
-                    <a:latin typeface="Times New Roman"/>
+                    <a:latin typeface="Arial"/>
                     <a:ea typeface="Times New Roman"/>
                     <a:cs typeface="Times New Roman"/>
                   </a:rPr>
@@ -2405,7 +2397,7 @@
                     <a:solidFill>
                       <a:srgbClr val="222222"/>
                     </a:solidFill>
-                    <a:latin typeface="Times New Roman"/>
+                    <a:latin typeface="Arial"/>
                     <a:ea typeface="Times New Roman"/>
                     <a:cs typeface="Times New Roman"/>
                   </a:rPr>
@@ -2448,7 +2440,7 @@
                     <a:solidFill>
                       <a:srgbClr val="222222"/>
                     </a:solidFill>
-                    <a:latin typeface="Times New Roman"/>
+                    <a:latin typeface="Arial"/>
                     <a:ea typeface="Times New Roman"/>
                     <a:cs typeface="Times New Roman"/>
                   </a:rPr>
@@ -2491,7 +2483,7 @@
                     <a:solidFill>
                       <a:srgbClr val="222222"/>
                     </a:solidFill>
-                    <a:latin typeface="Times New Roman"/>
+                    <a:latin typeface="Arial"/>
                     <a:ea typeface="Times New Roman"/>
                     <a:cs typeface="Times New Roman"/>
                   </a:rPr>
@@ -2671,7 +2663,7 @@
                     <a:solidFill>
                       <a:srgbClr val="222222"/>
                     </a:solidFill>
-                    <a:latin typeface="Times New Roman"/>
+                    <a:latin typeface="Comic Sans MS"/>
                     <a:ea typeface="Times New Roman"/>
                     <a:cs typeface="Times New Roman"/>
                   </a:rPr>
@@ -2714,7 +2706,7 @@
                     <a:solidFill>
                       <a:srgbClr val="222222"/>
                     </a:solidFill>
-                    <a:latin typeface="Times New Roman"/>
+                    <a:latin typeface="Arial"/>
                     <a:ea typeface="Times New Roman"/>
                     <a:cs typeface="Times New Roman"/>
                   </a:rPr>
@@ -2757,7 +2749,7 @@
                     <a:solidFill>
                       <a:srgbClr val="222222"/>
                     </a:solidFill>
-                    <a:latin typeface="Times New Roman"/>
+                    <a:latin typeface="Arial"/>
                     <a:ea typeface="Times New Roman"/>
                     <a:cs typeface="Times New Roman"/>
                   </a:rPr>
@@ -2774,7 +2766,7 @@
                     <a:solidFill>
                       <a:srgbClr val="222222"/>
                     </a:solidFill>
-                    <a:latin typeface="Times New Roman"/>
+                    <a:latin typeface="Arial"/>
                     <a:ea typeface="Times New Roman"/>
                     <a:cs typeface="Times New Roman"/>
                   </a:rPr>
@@ -2817,7 +2809,7 @@
                     <a:solidFill>
                       <a:srgbClr val="222222"/>
                     </a:solidFill>
-                    <a:latin typeface="Times New Roman"/>
+                    <a:latin typeface="Arial"/>
                     <a:ea typeface="Times New Roman"/>
                     <a:cs typeface="Times New Roman"/>
                   </a:rPr>
@@ -2860,7 +2852,7 @@
                     <a:solidFill>
                       <a:srgbClr val="222222"/>
                     </a:solidFill>
-                    <a:latin typeface="Times New Roman"/>
+                    <a:latin typeface="Arial"/>
                     <a:ea typeface="Times New Roman"/>
                     <a:cs typeface="Times New Roman"/>
                   </a:rPr>
@@ -2877,7 +2869,7 @@
                     <a:solidFill>
                       <a:srgbClr val="222222"/>
                     </a:solidFill>
-                    <a:latin typeface="Times New Roman"/>
+                    <a:latin typeface="Arial"/>
                     <a:ea typeface="Times New Roman"/>
                     <a:cs typeface="Times New Roman"/>
                   </a:rPr>
@@ -2920,7 +2912,7 @@
                     <a:solidFill>
                       <a:srgbClr val="222222"/>
                     </a:solidFill>
-                    <a:latin typeface="Times New Roman"/>
+                    <a:latin typeface="Arial"/>
                     <a:ea typeface="Times New Roman"/>
                     <a:cs typeface="Times New Roman"/>
                   </a:rPr>
@@ -2963,7 +2955,7 @@
                     <a:solidFill>
                       <a:srgbClr val="222222"/>
                     </a:solidFill>
-                    <a:latin typeface="Times New Roman"/>
+                    <a:latin typeface="Arial"/>
                     <a:ea typeface="Times New Roman"/>
                     <a:cs typeface="Times New Roman"/>
                   </a:rPr>
@@ -2980,7 +2972,7 @@
                     <a:solidFill>
                       <a:srgbClr val="222222"/>
                     </a:solidFill>
-                    <a:latin typeface="Times New Roman"/>
+                    <a:latin typeface="Arial"/>
                     <a:ea typeface="Times New Roman"/>
                     <a:cs typeface="Times New Roman"/>
                   </a:rPr>
@@ -3023,7 +3015,7 @@
                     <a:solidFill>
                       <a:srgbClr val="222222"/>
                     </a:solidFill>
-                    <a:latin typeface="Times New Roman"/>
+                    <a:latin typeface="Arial"/>
                     <a:ea typeface="Times New Roman"/>
                     <a:cs typeface="Times New Roman"/>
                   </a:rPr>
@@ -3326,7 +3318,7 @@
                     <a:solidFill>
                       <a:srgbClr val="222222"/>
                     </a:solidFill>
-                    <a:latin typeface="Times New Roman"/>
+                    <a:latin typeface="Comic Sans MS"/>
                     <a:ea typeface="Times New Roman"/>
                     <a:cs typeface="Times New Roman"/>
                   </a:rPr>
@@ -3369,7 +3361,7 @@
                     <a:solidFill>
                       <a:srgbClr val="222222"/>
                     </a:solidFill>
-                    <a:latin typeface="Times New Roman"/>
+                    <a:latin typeface="Arial"/>
                     <a:ea typeface="Times New Roman"/>
                     <a:cs typeface="Times New Roman"/>
                   </a:rPr>
@@ -3412,7 +3404,7 @@
                     <a:solidFill>
                       <a:srgbClr val="222222"/>
                     </a:solidFill>
-                    <a:latin typeface="Times New Roman"/>
+                    <a:latin typeface="Arial"/>
                     <a:ea typeface="Times New Roman"/>
                     <a:cs typeface="Times New Roman"/>
                   </a:rPr>
@@ -3455,7 +3447,7 @@
                     <a:solidFill>
                       <a:srgbClr val="222222"/>
                     </a:solidFill>
-                    <a:latin typeface="Times New Roman"/>
+                    <a:latin typeface="Arial"/>
                     <a:ea typeface="Times New Roman"/>
                     <a:cs typeface="Times New Roman"/>
                   </a:rPr>
@@ -3498,7 +3490,7 @@
                     <a:solidFill>
                       <a:srgbClr val="222222"/>
                     </a:solidFill>
-                    <a:latin typeface="Times New Roman"/>
+                    <a:latin typeface="Arial"/>
                     <a:ea typeface="Times New Roman"/>
                     <a:cs typeface="Times New Roman"/>
                   </a:rPr>
@@ -3541,7 +3533,7 @@
                     <a:solidFill>
                       <a:srgbClr val="222222"/>
                     </a:solidFill>
-                    <a:latin typeface="Times New Roman"/>
+                    <a:latin typeface="Arial"/>
                     <a:ea typeface="Times New Roman"/>
                     <a:cs typeface="Times New Roman"/>
                   </a:rPr>
@@ -3584,7 +3576,7 @@
                     <a:solidFill>
                       <a:srgbClr val="222222"/>
                     </a:solidFill>
-                    <a:latin typeface="Times New Roman"/>
+                    <a:latin typeface="Arial"/>
                     <a:ea typeface="Times New Roman"/>
                     <a:cs typeface="Times New Roman"/>
                   </a:rPr>
@@ -3627,7 +3619,7 @@
                     <a:solidFill>
                       <a:srgbClr val="222222"/>
                     </a:solidFill>
-                    <a:latin typeface="Times New Roman"/>
+                    <a:latin typeface="Arial"/>
                     <a:ea typeface="Times New Roman"/>
                     <a:cs typeface="Times New Roman"/>
                   </a:rPr>
@@ -3670,7 +3662,7 @@
                     <a:solidFill>
                       <a:srgbClr val="222222"/>
                     </a:solidFill>
-                    <a:latin typeface="Times New Roman"/>
+                    <a:latin typeface="Arial"/>
                     <a:ea typeface="Times New Roman"/>
                     <a:cs typeface="Times New Roman"/>
                   </a:rPr>
@@ -3713,7 +3705,7 @@
                     <a:solidFill>
                       <a:srgbClr val="222222"/>
                     </a:solidFill>
-                    <a:latin typeface="Times New Roman"/>
+                    <a:latin typeface="Arial"/>
                     <a:ea typeface="Times New Roman"/>
                     <a:cs typeface="Times New Roman"/>
                   </a:rPr>
